--- a/products/dsim/presentations/dsim-brief-one-pager.pptx
+++ b/products/dsim/presentations/dsim-brief-one-pager.pptx
@@ -1183,7 +1183,7 @@
                 <a:ea typeface="Calibri" pitchFamily="34" charset="-122"/>
                 <a:cs typeface="Calibri" pitchFamily="34" charset="-120"/>
               </a:rPr>
-              <a:t>Brands running Walmart Connect campaigns can measure ROAS — but not whether that ROAS reflects truly incremental sales, or whether an availability issue, low Share of Search, or poor content silently suppressed the lift they paid for.</a:t>
+              <a:t>75% of CPG advertisers call incrementality their #1 measurement challenge — yet every platform grading their own spend (CommerceIQ: observational model, 14-day window; Pacvue: Amazon-first, no Walmart store-cluster) tells you ROAS, not whether availability, Share of Search, or content silently capped the lift you paid for.</a:t>
             </a:r>
             <a:endParaRPr lang="en-US" sz="900" dirty="0"/>
           </a:p>
@@ -1347,7 +1347,7 @@
                 <a:ea typeface="Calibri" pitchFamily="34" charset="-122"/>
                 <a:cs typeface="Calibri" pitchFamily="34" charset="-120"/>
               </a:rPr>
-              <a:t>Decomposes sales lift across 6 shelf + media levers — not just 'did it work?' but why it worked and what constrained it.</a:t>
+              <a:t>Decomposes sales lift across 6 shelf + media levers with published 5.9% MAPE and R²=91%. Competitors (CommerceIQ, Pacvue) publish no equivalent accuracy metrics.</a:t>
             </a:r>
             <a:endParaRPr lang="en-US" sz="850" dirty="0"/>
           </a:p>
@@ -1472,7 +1472,7 @@
                 <a:ea typeface="Calibri" pitchFamily="34" charset="-122"/>
                 <a:cs typeface="Calibri" pitchFamily="34" charset="-120"/>
               </a:rPr>
-              <a:t>Localizes attribution to store clusters, not channel-level averages — exposing geographic misallocation invisible in aggregate reporting.</a:t>
+              <a:t>Localizes attribution to store behavioral clusters — exposing geographic misallocation invisible in aggregate ROAS. No activation platform (CommerceIQ, Pacvue, Skai) offers this for Walmart.</a:t>
             </a:r>
             <a:endParaRPr lang="en-US" sz="850" dirty="0"/>
           </a:p>
@@ -1597,7 +1597,7 @@
                 <a:ea typeface="Calibri" pitchFamily="34" charset="-122"/>
                 <a:cs typeface="Calibri" pitchFamily="34" charset="-120"/>
               </a:rPr>
-              <a:t>No activation platform conflict. DSIM is the independent measurement layer — a score no platform can produce for its own campaigns.</a:t>
+              <a:t>No activation stake, no agency ownership. Unlike Profitero (Publicis-owned since 2026) and CommerceIQ/Pacvue (grade their own campaigns), DSIM is the number your CFO can defend.</a:t>
             </a:r>
             <a:endParaRPr lang="en-US" sz="850" dirty="0"/>
           </a:p>

--- a/products/dsim/presentations/dsim-brief-one-pager.pptx
+++ b/products/dsim/presentations/dsim-brief-one-pager.pptx
@@ -1026,7 +1026,7 @@
                 <a:ea typeface="Calibri" pitchFamily="34" charset="-122"/>
                 <a:cs typeface="Calibri" pitchFamily="34" charset="-120"/>
               </a:rPr>
-              <a:t>Closing the attribution gap between media spend and shelf outcomes on Walmart</a:t>
+              <a:t>Which of your 6 shelf and media levers drove Walmart sales — by store cluster. Not ROAS. Causation.</a:t>
             </a:r>
             <a:endParaRPr lang="en-US" sz="900" dirty="0"/>
           </a:p>
@@ -1065,7 +1065,7 @@
                 <a:ea typeface="Calibri" pitchFamily="34" charset="-122"/>
                 <a:cs typeface="Calibri" pitchFamily="34" charset="-120"/>
               </a:rPr>
-              <a:t>For: RGM Leaders  ·  eCommerce Leads</a:t>
+              <a:t>For: eCommerce Leads  ·  Finance / RGM  ·  Brand</a:t>
             </a:r>
             <a:endParaRPr lang="en-US" sz="850" dirty="0"/>
           </a:p>
